--- a/ゲーム科1年/00_前期/プログラミングⅡ/00_配列.pptx
+++ b/ゲーム科1年/00_前期/プログラミングⅡ/00_配列.pptx
@@ -265,7 +265,7 @@
           <a:p>
             <a:fld id="{E9CC885B-4903-4D54-9A93-00025F12DED9}" type="datetimeFigureOut">
               <a:rPr kumimoji="1" lang="ja-JP" altLang="en-US" smtClean="0"/>
-              <a:t>2024/11/15</a:t>
+              <a:t>2025/2/28</a:t>
             </a:fld>
             <a:endParaRPr kumimoji="1" lang="ja-JP" altLang="en-US"/>
           </a:p>
@@ -495,7 +495,7 @@
           <a:p>
             <a:fld id="{E9CC885B-4903-4D54-9A93-00025F12DED9}" type="datetimeFigureOut">
               <a:rPr kumimoji="1" lang="ja-JP" altLang="en-US" smtClean="0"/>
-              <a:t>2024/11/15</a:t>
+              <a:t>2025/2/28</a:t>
             </a:fld>
             <a:endParaRPr kumimoji="1" lang="ja-JP" altLang="en-US"/>
           </a:p>
@@ -735,7 +735,7 @@
           <a:p>
             <a:fld id="{E9CC885B-4903-4D54-9A93-00025F12DED9}" type="datetimeFigureOut">
               <a:rPr kumimoji="1" lang="ja-JP" altLang="en-US" smtClean="0"/>
-              <a:t>2024/11/15</a:t>
+              <a:t>2025/2/28</a:t>
             </a:fld>
             <a:endParaRPr kumimoji="1" lang="ja-JP" altLang="en-US"/>
           </a:p>
@@ -965,7 +965,7 @@
           <a:p>
             <a:fld id="{E9CC885B-4903-4D54-9A93-00025F12DED9}" type="datetimeFigureOut">
               <a:rPr kumimoji="1" lang="ja-JP" altLang="en-US" smtClean="0"/>
-              <a:t>2024/11/15</a:t>
+              <a:t>2025/2/28</a:t>
             </a:fld>
             <a:endParaRPr kumimoji="1" lang="ja-JP" altLang="en-US"/>
           </a:p>
@@ -1240,7 +1240,7 @@
           <a:p>
             <a:fld id="{E9CC885B-4903-4D54-9A93-00025F12DED9}" type="datetimeFigureOut">
               <a:rPr kumimoji="1" lang="ja-JP" altLang="en-US" smtClean="0"/>
-              <a:t>2024/11/15</a:t>
+              <a:t>2025/2/28</a:t>
             </a:fld>
             <a:endParaRPr kumimoji="1" lang="ja-JP" altLang="en-US"/>
           </a:p>
@@ -1569,7 +1569,7 @@
           <a:p>
             <a:fld id="{E9CC885B-4903-4D54-9A93-00025F12DED9}" type="datetimeFigureOut">
               <a:rPr kumimoji="1" lang="ja-JP" altLang="en-US" smtClean="0"/>
-              <a:t>2024/11/15</a:t>
+              <a:t>2025/2/28</a:t>
             </a:fld>
             <a:endParaRPr kumimoji="1" lang="ja-JP" altLang="en-US"/>
           </a:p>
@@ -2045,7 +2045,7 @@
           <a:p>
             <a:fld id="{E9CC885B-4903-4D54-9A93-00025F12DED9}" type="datetimeFigureOut">
               <a:rPr kumimoji="1" lang="ja-JP" altLang="en-US" smtClean="0"/>
-              <a:t>2024/11/15</a:t>
+              <a:t>2025/2/28</a:t>
             </a:fld>
             <a:endParaRPr kumimoji="1" lang="ja-JP" altLang="en-US"/>
           </a:p>
@@ -2186,7 +2186,7 @@
           <a:p>
             <a:fld id="{E9CC885B-4903-4D54-9A93-00025F12DED9}" type="datetimeFigureOut">
               <a:rPr kumimoji="1" lang="ja-JP" altLang="en-US" smtClean="0"/>
-              <a:t>2024/11/15</a:t>
+              <a:t>2025/2/28</a:t>
             </a:fld>
             <a:endParaRPr kumimoji="1" lang="ja-JP" altLang="en-US"/>
           </a:p>
@@ -2299,7 +2299,7 @@
           <a:p>
             <a:fld id="{E9CC885B-4903-4D54-9A93-00025F12DED9}" type="datetimeFigureOut">
               <a:rPr kumimoji="1" lang="ja-JP" altLang="en-US" smtClean="0"/>
-              <a:t>2024/11/15</a:t>
+              <a:t>2025/2/28</a:t>
             </a:fld>
             <a:endParaRPr kumimoji="1" lang="ja-JP" altLang="en-US"/>
           </a:p>
@@ -2642,7 +2642,7 @@
           <a:p>
             <a:fld id="{E9CC885B-4903-4D54-9A93-00025F12DED9}" type="datetimeFigureOut">
               <a:rPr kumimoji="1" lang="ja-JP" altLang="en-US" smtClean="0"/>
-              <a:t>2024/11/15</a:t>
+              <a:t>2025/2/28</a:t>
             </a:fld>
             <a:endParaRPr kumimoji="1" lang="ja-JP" altLang="en-US"/>
           </a:p>
@@ -2930,7 +2930,7 @@
           <a:p>
             <a:fld id="{E9CC885B-4903-4D54-9A93-00025F12DED9}" type="datetimeFigureOut">
               <a:rPr kumimoji="1" lang="ja-JP" altLang="en-US" smtClean="0"/>
-              <a:t>2024/11/15</a:t>
+              <a:t>2025/2/28</a:t>
             </a:fld>
             <a:endParaRPr kumimoji="1" lang="ja-JP" altLang="en-US"/>
           </a:p>
@@ -3203,7 +3203,7 @@
           <a:p>
             <a:fld id="{E9CC885B-4903-4D54-9A93-00025F12DED9}" type="datetimeFigureOut">
               <a:rPr kumimoji="1" lang="ja-JP" altLang="en-US" smtClean="0"/>
-              <a:t>2024/11/15</a:t>
+              <a:t>2025/2/28</a:t>
             </a:fld>
             <a:endParaRPr kumimoji="1" lang="ja-JP" altLang="en-US"/>
           </a:p>
@@ -3804,7 +3804,7 @@
         <p:spPr>
           <a:xfrm>
             <a:off x="567542" y="1189161"/>
-            <a:ext cx="3337773" cy="461665"/>
+            <a:ext cx="3417923" cy="461665"/>
           </a:xfrm>
           <a:prstGeom prst="rect">
             <a:avLst/>
@@ -3818,7 +3818,11 @@
           <a:lstStyle/>
           <a:p>
             <a:r>
-              <a:rPr lang="en-US" altLang="ja-JP" sz="2400" dirty="0"/>
+              <a:rPr lang="en-US" altLang="ja-JP" sz="2400" b="1" dirty="0">
+                <a:solidFill>
+                  <a:srgbClr val="FF0000"/>
+                </a:solidFill>
+              </a:rPr>
               <a:t>Main.cpp</a:t>
             </a:r>
             <a:r>

--- a/ゲーム科1年/00_前期/プログラミングⅡ/00_配列.pptx
+++ b/ゲーム科1年/00_前期/プログラミングⅡ/00_配列.pptx
@@ -265,7 +265,7 @@
           <a:p>
             <a:fld id="{E9CC885B-4903-4D54-9A93-00025F12DED9}" type="datetimeFigureOut">
               <a:rPr kumimoji="1" lang="ja-JP" altLang="en-US" smtClean="0"/>
-              <a:t>2025/2/28</a:t>
+              <a:t>2026/4/6</a:t>
             </a:fld>
             <a:endParaRPr kumimoji="1" lang="ja-JP" altLang="en-US"/>
           </a:p>
@@ -495,7 +495,7 @@
           <a:p>
             <a:fld id="{E9CC885B-4903-4D54-9A93-00025F12DED9}" type="datetimeFigureOut">
               <a:rPr kumimoji="1" lang="ja-JP" altLang="en-US" smtClean="0"/>
-              <a:t>2025/2/28</a:t>
+              <a:t>2026/4/6</a:t>
             </a:fld>
             <a:endParaRPr kumimoji="1" lang="ja-JP" altLang="en-US"/>
           </a:p>
@@ -735,7 +735,7 @@
           <a:p>
             <a:fld id="{E9CC885B-4903-4D54-9A93-00025F12DED9}" type="datetimeFigureOut">
               <a:rPr kumimoji="1" lang="ja-JP" altLang="en-US" smtClean="0"/>
-              <a:t>2025/2/28</a:t>
+              <a:t>2026/4/6</a:t>
             </a:fld>
             <a:endParaRPr kumimoji="1" lang="ja-JP" altLang="en-US"/>
           </a:p>
@@ -965,7 +965,7 @@
           <a:p>
             <a:fld id="{E9CC885B-4903-4D54-9A93-00025F12DED9}" type="datetimeFigureOut">
               <a:rPr kumimoji="1" lang="ja-JP" altLang="en-US" smtClean="0"/>
-              <a:t>2025/2/28</a:t>
+              <a:t>2026/4/6</a:t>
             </a:fld>
             <a:endParaRPr kumimoji="1" lang="ja-JP" altLang="en-US"/>
           </a:p>
@@ -1240,7 +1240,7 @@
           <a:p>
             <a:fld id="{E9CC885B-4903-4D54-9A93-00025F12DED9}" type="datetimeFigureOut">
               <a:rPr kumimoji="1" lang="ja-JP" altLang="en-US" smtClean="0"/>
-              <a:t>2025/2/28</a:t>
+              <a:t>2026/4/6</a:t>
             </a:fld>
             <a:endParaRPr kumimoji="1" lang="ja-JP" altLang="en-US"/>
           </a:p>
@@ -1569,7 +1569,7 @@
           <a:p>
             <a:fld id="{E9CC885B-4903-4D54-9A93-00025F12DED9}" type="datetimeFigureOut">
               <a:rPr kumimoji="1" lang="ja-JP" altLang="en-US" smtClean="0"/>
-              <a:t>2025/2/28</a:t>
+              <a:t>2026/4/6</a:t>
             </a:fld>
             <a:endParaRPr kumimoji="1" lang="ja-JP" altLang="en-US"/>
           </a:p>
@@ -2045,7 +2045,7 @@
           <a:p>
             <a:fld id="{E9CC885B-4903-4D54-9A93-00025F12DED9}" type="datetimeFigureOut">
               <a:rPr kumimoji="1" lang="ja-JP" altLang="en-US" smtClean="0"/>
-              <a:t>2025/2/28</a:t>
+              <a:t>2026/4/6</a:t>
             </a:fld>
             <a:endParaRPr kumimoji="1" lang="ja-JP" altLang="en-US"/>
           </a:p>
@@ -2186,7 +2186,7 @@
           <a:p>
             <a:fld id="{E9CC885B-4903-4D54-9A93-00025F12DED9}" type="datetimeFigureOut">
               <a:rPr kumimoji="1" lang="ja-JP" altLang="en-US" smtClean="0"/>
-              <a:t>2025/2/28</a:t>
+              <a:t>2026/4/6</a:t>
             </a:fld>
             <a:endParaRPr kumimoji="1" lang="ja-JP" altLang="en-US"/>
           </a:p>
@@ -2299,7 +2299,7 @@
           <a:p>
             <a:fld id="{E9CC885B-4903-4D54-9A93-00025F12DED9}" type="datetimeFigureOut">
               <a:rPr kumimoji="1" lang="ja-JP" altLang="en-US" smtClean="0"/>
-              <a:t>2025/2/28</a:t>
+              <a:t>2026/4/6</a:t>
             </a:fld>
             <a:endParaRPr kumimoji="1" lang="ja-JP" altLang="en-US"/>
           </a:p>
@@ -2642,7 +2642,7 @@
           <a:p>
             <a:fld id="{E9CC885B-4903-4D54-9A93-00025F12DED9}" type="datetimeFigureOut">
               <a:rPr kumimoji="1" lang="ja-JP" altLang="en-US" smtClean="0"/>
-              <a:t>2025/2/28</a:t>
+              <a:t>2026/4/6</a:t>
             </a:fld>
             <a:endParaRPr kumimoji="1" lang="ja-JP" altLang="en-US"/>
           </a:p>
@@ -2930,7 +2930,7 @@
           <a:p>
             <a:fld id="{E9CC885B-4903-4D54-9A93-00025F12DED9}" type="datetimeFigureOut">
               <a:rPr kumimoji="1" lang="ja-JP" altLang="en-US" smtClean="0"/>
-              <a:t>2025/2/28</a:t>
+              <a:t>2026/4/6</a:t>
             </a:fld>
             <a:endParaRPr kumimoji="1" lang="ja-JP" altLang="en-US"/>
           </a:p>
@@ -3203,7 +3203,7 @@
           <a:p>
             <a:fld id="{E9CC885B-4903-4D54-9A93-00025F12DED9}" type="datetimeFigureOut">
               <a:rPr kumimoji="1" lang="ja-JP" altLang="en-US" smtClean="0"/>
-              <a:t>2025/2/28</a:t>
+              <a:t>2026/4/6</a:t>
             </a:fld>
             <a:endParaRPr kumimoji="1" lang="ja-JP" altLang="en-US"/>
           </a:p>
@@ -3671,7 +3671,7 @@
         <p:spPr>
           <a:xfrm>
             <a:off x="567542" y="1189161"/>
-            <a:ext cx="10033516" cy="830997"/>
+            <a:ext cx="10956846" cy="830997"/>
           </a:xfrm>
           <a:prstGeom prst="rect">
             <a:avLst/>
@@ -3706,7 +3706,7 @@
                   <a:srgbClr val="FF0000"/>
                 </a:solidFill>
               </a:rPr>
-              <a:t>複数をまとめて扱う</a:t>
+              <a:t>複数の変数をまとめて扱う</a:t>
             </a:r>
             <a:r>
               <a:rPr lang="ja-JP" altLang="en-US" sz="2400" dirty="0"/>
